--- a/a7/packages/A7 Unit 4 - Solving Problems with Rational Numbers/Slides/A7 4.06  Slides.pptx
+++ b/a7/packages/A7 Unit 4 - Solving Problems with Rational Numbers/Slides/A7 4.06  Slides.pptx
@@ -3817,7 +3817,7 @@
       </p:sp>
       <p:pic>
         <p:nvPicPr>
-          <p:cNvPr id="9" name="Picture 8" descr="dcc7e91a07786a42.png"/>
+          <p:cNvPr id="9" name="Picture 8" descr="7d9dafa919c33afa.png"/>
           <p:cNvPicPr>
             <a:picLocks noChangeAspect="1"/>
           </p:cNvPicPr>
@@ -3831,8 +3831,8 @@
         </p:blipFill>
         <p:spPr>
           <a:xfrm>
-            <a:off x="3811523" y="2194560"/>
-            <a:ext cx="4538472" cy="630936"/>
+            <a:off x="3814571" y="2194560"/>
+            <a:ext cx="4532376" cy="630936"/>
           </a:xfrm>
           <a:prstGeom prst="rect">
             <a:avLst/>
@@ -4174,7 +4174,7 @@
       </p:sp>
       <p:pic>
         <p:nvPicPr>
-          <p:cNvPr id="9" name="Picture 8" descr="669e393f46eb0f5e.png"/>
+          <p:cNvPr id="9" name="Picture 8" descr="9657b87afa13d574.png"/>
           <p:cNvPicPr>
             <a:picLocks noChangeAspect="1"/>
           </p:cNvPicPr>
@@ -4188,8 +4188,8 @@
         </p:blipFill>
         <p:spPr>
           <a:xfrm>
-            <a:off x="4890515" y="2103120"/>
-            <a:ext cx="2380488" cy="682752"/>
+            <a:off x="4681727" y="2103120"/>
+            <a:ext cx="2798064" cy="871728"/>
           </a:xfrm>
           <a:prstGeom prst="rect">
             <a:avLst/>
@@ -4204,7 +4204,7 @@
         </p:nvSpPr>
         <p:spPr>
           <a:xfrm>
-            <a:off x="777240" y="3288792"/>
+            <a:off x="777240" y="3477768"/>
             <a:ext cx="10607040" cy="429370"/>
           </a:xfrm>
           <a:prstGeom prst="rect">
@@ -4496,7 +4496,7 @@
       </p:sp>
       <p:pic>
         <p:nvPicPr>
-          <p:cNvPr id="9" name="Picture 8" descr="8be85ae969d2fde7.png"/>
+          <p:cNvPr id="9" name="Picture 8" descr="184a5d14892d37dc.png"/>
           <p:cNvPicPr>
             <a:picLocks noChangeAspect="1"/>
           </p:cNvPicPr>
@@ -4511,7 +4511,7 @@
         <p:spPr>
           <a:xfrm>
             <a:off x="1828800" y="1920240"/>
-            <a:ext cx="2145792" cy="606552"/>
+            <a:ext cx="2676144" cy="810768"/>
           </a:xfrm>
           <a:prstGeom prst="rect">
             <a:avLst/>
@@ -4526,7 +4526,7 @@
         </p:nvSpPr>
         <p:spPr>
           <a:xfrm>
-            <a:off x="4431792" y="1994916"/>
+            <a:off x="4962144" y="2097024"/>
             <a:ext cx="6400800" cy="502920"/>
           </a:xfrm>
           <a:prstGeom prst="rect">
@@ -4555,7 +4555,7 @@
       </p:sp>
       <p:pic>
         <p:nvPicPr>
-          <p:cNvPr id="11" name="Picture 10" descr="aa52295ca59ce4d4.png"/>
+          <p:cNvPr id="11" name="Picture 10" descr="d857c92eedcaecc7.png"/>
           <p:cNvPicPr>
             <a:picLocks noChangeAspect="1"/>
           </p:cNvPicPr>
@@ -4569,8 +4569,8 @@
         </p:blipFill>
         <p:spPr>
           <a:xfrm>
-            <a:off x="1828800" y="2801112"/>
-            <a:ext cx="3322320" cy="643128"/>
+            <a:off x="1828800" y="3005328"/>
+            <a:ext cx="3627120" cy="813816"/>
           </a:xfrm>
           <a:prstGeom prst="rect">
             <a:avLst/>
@@ -4585,8 +4585,8 @@
         </p:nvSpPr>
         <p:spPr>
           <a:xfrm>
-            <a:off x="5608320" y="2894076"/>
-            <a:ext cx="5775960" cy="502920"/>
+            <a:off x="5913120" y="3183636"/>
+            <a:ext cx="5471159" cy="502920"/>
           </a:xfrm>
           <a:prstGeom prst="rect">
             <a:avLst/>
@@ -4614,7 +4614,7 @@
       </p:sp>
       <p:pic>
         <p:nvPicPr>
-          <p:cNvPr id="13" name="Picture 12" descr="6ffd3a6d58224780.png"/>
+          <p:cNvPr id="13" name="Picture 12" descr="72e6766a18ceae4c.png"/>
           <p:cNvPicPr>
             <a:picLocks noChangeAspect="1"/>
           </p:cNvPicPr>
@@ -4628,8 +4628,8 @@
         </p:blipFill>
         <p:spPr>
           <a:xfrm>
-            <a:off x="1828800" y="3718560"/>
-            <a:ext cx="1746504" cy="515112"/>
+            <a:off x="1828800" y="4093464"/>
+            <a:ext cx="1984248" cy="679704"/>
           </a:xfrm>
           <a:prstGeom prst="rect">
             <a:avLst/>
@@ -4644,7 +4644,7 @@
         </p:nvSpPr>
         <p:spPr>
           <a:xfrm>
-            <a:off x="4032504" y="3747515"/>
+            <a:off x="4270248" y="4204716"/>
             <a:ext cx="6400800" cy="502920"/>
           </a:xfrm>
           <a:prstGeom prst="rect">
@@ -4679,7 +4679,7 @@
         </p:nvSpPr>
         <p:spPr>
           <a:xfrm>
-            <a:off x="777240" y="4690872"/>
+            <a:off x="777240" y="5230368"/>
             <a:ext cx="10607040" cy="548640"/>
           </a:xfrm>
           <a:prstGeom prst="rect">
@@ -4971,7 +4971,7 @@
       </p:sp>
       <p:pic>
         <p:nvPicPr>
-          <p:cNvPr id="9" name="Picture 8" descr="17399fcdc2a8f563.png"/>
+          <p:cNvPr id="9" name="Picture 8" descr="c8e5417f2d59a8e1.png"/>
           <p:cNvPicPr>
             <a:picLocks noChangeAspect="1"/>
           </p:cNvPicPr>
@@ -4985,8 +4985,8 @@
         </p:blipFill>
         <p:spPr>
           <a:xfrm>
-            <a:off x="4415028" y="2194560"/>
-            <a:ext cx="3331464" cy="850392"/>
+            <a:off x="4079747" y="2194560"/>
+            <a:ext cx="4002024" cy="1085088"/>
           </a:xfrm>
           <a:prstGeom prst="rect">
             <a:avLst/>
@@ -5258,7 +5258,7 @@
       </p:sp>
       <p:pic>
         <p:nvPicPr>
-          <p:cNvPr id="9" name="Picture 8" descr="17399fcdc2a8f563.png"/>
+          <p:cNvPr id="9" name="Picture 8" descr="7dacaa3a652d2758.png"/>
           <p:cNvPicPr>
             <a:picLocks noChangeAspect="1"/>
           </p:cNvPicPr>
@@ -5272,8 +5272,8 @@
         </p:blipFill>
         <p:spPr>
           <a:xfrm>
-            <a:off x="4415028" y="2194560"/>
-            <a:ext cx="3331464" cy="850392"/>
+            <a:off x="4081271" y="2194560"/>
+            <a:ext cx="3998975" cy="1088136"/>
           </a:xfrm>
           <a:prstGeom prst="rect">
             <a:avLst/>
@@ -5288,7 +5288,7 @@
         </p:nvSpPr>
         <p:spPr>
           <a:xfrm>
-            <a:off x="777240" y="3364992"/>
+            <a:off x="777240" y="3602736"/>
             <a:ext cx="10607040" cy="429370"/>
           </a:xfrm>
           <a:prstGeom prst="rect">
@@ -5972,7 +5972,7 @@
       </p:sp>
       <p:pic>
         <p:nvPicPr>
-          <p:cNvPr id="9" name="Picture 8" descr="6f2b5e6da5da13af.png"/>
+          <p:cNvPr id="9" name="Picture 8" descr="2fd862883ce8c3fd.png"/>
           <p:cNvPicPr>
             <a:picLocks noChangeAspect="1"/>
           </p:cNvPicPr>
@@ -6335,8 +6335,8 @@
         </p:nvSpPr>
         <p:spPr>
           <a:xfrm>
-            <a:off x="2219451" y="2217420"/>
-            <a:ext cx="4331208" cy="457200"/>
+            <a:off x="2547164" y="2217420"/>
+            <a:ext cx="3889329" cy="457200"/>
           </a:xfrm>
           <a:prstGeom prst="rect">
             <a:avLst/>
@@ -6345,7 +6345,7 @@
         </p:spPr>
         <p:txBody>
           <a:bodyPr wrap="none" lIns="45720" rIns="45720" tIns="18288" bIns="18288" anchor="ctr">
-            <a:spAutoFit/>
+            <a:noAutofit/>
           </a:bodyPr>
           <a:lstStyle/>
           <a:p>
@@ -6378,7 +6378,7 @@
         </p:blipFill>
         <p:spPr>
           <a:xfrm>
-            <a:off x="6413500" y="2194560"/>
+            <a:off x="6299333" y="2194560"/>
             <a:ext cx="1051560" cy="502920"/>
           </a:xfrm>
           <a:prstGeom prst="rect">
@@ -6394,8 +6394,8 @@
         </p:nvSpPr>
         <p:spPr>
           <a:xfrm>
-            <a:off x="7465060" y="2217420"/>
-            <a:ext cx="2614168" cy="457200"/>
+            <a:off x="7350893" y="2217420"/>
+            <a:ext cx="2400621" cy="457200"/>
           </a:xfrm>
           <a:prstGeom prst="rect">
             <a:avLst/>
@@ -6404,7 +6404,7 @@
         </p:spPr>
         <p:txBody>
           <a:bodyPr wrap="none" lIns="45720" rIns="45720" tIns="18288" bIns="18288" anchor="ctr">
-            <a:spAutoFit/>
+            <a:noAutofit/>
           </a:bodyPr>
           <a:lstStyle/>
           <a:p>
@@ -6832,8 +6832,8 @@
         </p:nvSpPr>
         <p:spPr>
           <a:xfrm>
-            <a:off x="2219451" y="2125979"/>
-            <a:ext cx="4331208" cy="457200"/>
+            <a:off x="2551736" y="2125979"/>
+            <a:ext cx="3889329" cy="457200"/>
           </a:xfrm>
           <a:prstGeom prst="rect">
             <a:avLst/>
@@ -6842,7 +6842,7 @@
         </p:spPr>
         <p:txBody>
           <a:bodyPr wrap="none" lIns="45720" rIns="45720" tIns="18288" bIns="18288" anchor="ctr">
-            <a:spAutoFit/>
+            <a:noAutofit/>
           </a:bodyPr>
           <a:lstStyle/>
           <a:p>
@@ -6861,7 +6861,7 @@
       </p:sp>
       <p:pic>
         <p:nvPicPr>
-          <p:cNvPr id="10" name="Picture 9" descr="ae9cca3e3cb96ab4.png"/>
+          <p:cNvPr id="10" name="Picture 9" descr="7a82a4f80dc024df.png"/>
           <p:cNvPicPr>
             <a:picLocks noChangeAspect="1"/>
           </p:cNvPicPr>
@@ -6875,8 +6875,8 @@
         </p:blipFill>
         <p:spPr>
           <a:xfrm>
-            <a:off x="6413500" y="2103120"/>
-            <a:ext cx="1051560" cy="502920"/>
+            <a:off x="6303905" y="2103120"/>
+            <a:ext cx="1042415" cy="502920"/>
           </a:xfrm>
           <a:prstGeom prst="rect">
             <a:avLst/>
@@ -6891,8 +6891,8 @@
         </p:nvSpPr>
         <p:spPr>
           <a:xfrm>
-            <a:off x="7465060" y="2125979"/>
-            <a:ext cx="2614168" cy="457200"/>
+            <a:off x="7346321" y="2125979"/>
+            <a:ext cx="2400621" cy="457200"/>
           </a:xfrm>
           <a:prstGeom prst="rect">
             <a:avLst/>
@@ -6901,7 +6901,7 @@
         </p:spPr>
         <p:txBody>
           <a:bodyPr wrap="none" lIns="45720" rIns="45720" tIns="18288" bIns="18288" anchor="ctr">
-            <a:spAutoFit/>
+            <a:noAutofit/>
           </a:bodyPr>
           <a:lstStyle/>
           <a:p>
@@ -7687,7 +7687,7 @@
         <p:spPr>
           <a:xfrm>
             <a:off x="1874519" y="1760220"/>
-            <a:ext cx="969771" cy="457200"/>
+            <a:ext cx="720605" cy="457200"/>
           </a:xfrm>
           <a:prstGeom prst="rect">
             <a:avLst/>
@@ -7696,7 +7696,7 @@
         </p:spPr>
         <p:txBody>
           <a:bodyPr wrap="none" lIns="45720" rIns="45720" tIns="18288" bIns="18288" anchor="ctr">
-            <a:spAutoFit/>
+            <a:noAutofit/>
           </a:bodyPr>
           <a:lstStyle/>
           <a:p>
@@ -7729,7 +7729,7 @@
         </p:blipFill>
         <p:spPr>
           <a:xfrm>
-            <a:off x="2707132" y="1784604"/>
+            <a:off x="2457965" y="1784604"/>
             <a:ext cx="1143000" cy="408432"/>
           </a:xfrm>
           <a:prstGeom prst="rect">
@@ -7746,7 +7746,7 @@
         <p:spPr>
           <a:xfrm>
             <a:off x="1874519" y="2372868"/>
-            <a:ext cx="7501128" cy="457200"/>
+            <a:ext cx="6812791" cy="457200"/>
           </a:xfrm>
           <a:prstGeom prst="rect">
             <a:avLst/>
@@ -7755,7 +7755,7 @@
         </p:spPr>
         <p:txBody>
           <a:bodyPr wrap="none" lIns="45720" rIns="45720" tIns="18288" bIns="18288" anchor="ctr">
-            <a:spAutoFit/>
+            <a:noAutofit/>
           </a:bodyPr>
           <a:lstStyle/>
           <a:p>
@@ -7780,8 +7780,8 @@
         </p:nvSpPr>
         <p:spPr>
           <a:xfrm>
-            <a:off x="1874519" y="2990088"/>
-            <a:ext cx="3551936" cy="457200"/>
+            <a:off x="1874519" y="3057144"/>
+            <a:ext cx="3064939" cy="457200"/>
           </a:xfrm>
           <a:prstGeom prst="rect">
             <a:avLst/>
@@ -7790,7 +7790,7 @@
         </p:spPr>
         <p:txBody>
           <a:bodyPr wrap="none" lIns="45720" rIns="45720" tIns="18288" bIns="18288" anchor="ctr">
-            <a:spAutoFit/>
+            <a:noAutofit/>
           </a:bodyPr>
           <a:lstStyle/>
           <a:p>
@@ -7809,7 +7809,7 @@
       </p:sp>
       <p:pic>
         <p:nvPicPr>
-          <p:cNvPr id="13" name="Picture 12" descr="fb6a4badbefdb6e3.png"/>
+          <p:cNvPr id="13" name="Picture 12" descr="70fd4f7c195b27fd.png"/>
           <p:cNvPicPr>
             <a:picLocks noChangeAspect="1"/>
           </p:cNvPicPr>
@@ -7823,8 +7823,8 @@
         </p:blipFill>
         <p:spPr>
           <a:xfrm>
-            <a:off x="5289296" y="3008376"/>
-            <a:ext cx="701040" cy="420624"/>
+            <a:off x="4802299" y="3008376"/>
+            <a:ext cx="795528" cy="554736"/>
           </a:xfrm>
           <a:prstGeom prst="rect">
             <a:avLst/>
@@ -7839,8 +7839,8 @@
         </p:nvSpPr>
         <p:spPr>
           <a:xfrm>
-            <a:off x="1874519" y="3607308"/>
-            <a:ext cx="2640584" cy="457200"/>
+            <a:off x="1874519" y="3741420"/>
+            <a:ext cx="2276518" cy="457200"/>
           </a:xfrm>
           <a:prstGeom prst="rect">
             <a:avLst/>
@@ -7849,7 +7849,7 @@
         </p:spPr>
         <p:txBody>
           <a:bodyPr wrap="none" lIns="45720" rIns="45720" tIns="18288" bIns="18288" anchor="ctr">
-            <a:spAutoFit/>
+            <a:noAutofit/>
           </a:bodyPr>
           <a:lstStyle/>
           <a:p>
@@ -7882,7 +7882,7 @@
         </p:blipFill>
         <p:spPr>
           <a:xfrm>
-            <a:off x="4377944" y="3720084"/>
+            <a:off x="4013878" y="3854196"/>
             <a:ext cx="1088136" cy="231648"/>
           </a:xfrm>
           <a:prstGeom prst="rect">
@@ -8155,7 +8155,7 @@
       </p:sp>
       <p:pic>
         <p:nvPicPr>
-          <p:cNvPr id="9" name="Picture 8" descr="0bd57d1fcf1bcfbb.png"/>
+          <p:cNvPr id="9" name="Picture 8" descr="e06ac948f72f4ec3.png"/>
           <p:cNvPicPr>
             <a:picLocks noChangeAspect="1"/>
           </p:cNvPicPr>
@@ -8169,8 +8169,8 @@
         </p:blipFill>
         <p:spPr>
           <a:xfrm>
-            <a:off x="5314187" y="2162556"/>
-            <a:ext cx="1533144" cy="292608"/>
+            <a:off x="5314187" y="2164080"/>
+            <a:ext cx="1533144" cy="289560"/>
           </a:xfrm>
           <a:prstGeom prst="rect">
             <a:avLst/>
@@ -8512,7 +8512,7 @@
       </p:sp>
       <p:pic>
         <p:nvPicPr>
-          <p:cNvPr id="9" name="Picture 8" descr="aa891813ee6f3ea5.png"/>
+          <p:cNvPr id="9" name="Picture 8" descr="4a8f8f45b07cb518.png"/>
           <p:cNvPicPr>
             <a:picLocks noChangeAspect="1"/>
           </p:cNvPicPr>
@@ -8526,8 +8526,8 @@
         </p:blipFill>
         <p:spPr>
           <a:xfrm>
-            <a:off x="5667755" y="2194560"/>
-            <a:ext cx="826008" cy="606552"/>
+            <a:off x="5492495" y="2194560"/>
+            <a:ext cx="1176528" cy="816864"/>
           </a:xfrm>
           <a:prstGeom prst="rect">
             <a:avLst/>
@@ -8869,7 +8869,7 @@
       </p:sp>
       <p:pic>
         <p:nvPicPr>
-          <p:cNvPr id="9" name="Picture 8" descr="aa891813ee6f3ea5.png"/>
+          <p:cNvPr id="9" name="Picture 8" descr="19aa5c3e206c11fc.png"/>
           <p:cNvPicPr>
             <a:picLocks noChangeAspect="1"/>
           </p:cNvPicPr>
@@ -8883,8 +8883,8 @@
         </p:blipFill>
         <p:spPr>
           <a:xfrm>
-            <a:off x="5667755" y="2103120"/>
-            <a:ext cx="826008" cy="606552"/>
+            <a:off x="5494020" y="2103120"/>
+            <a:ext cx="1173480" cy="810768"/>
           </a:xfrm>
           <a:prstGeom prst="rect">
             <a:avLst/>
@@ -8899,7 +8899,7 @@
         </p:nvSpPr>
         <p:spPr>
           <a:xfrm>
-            <a:off x="1828800" y="3029711"/>
+            <a:off x="1828800" y="3233927"/>
             <a:ext cx="8503920" cy="548640"/>
           </a:xfrm>
           <a:prstGeom prst="rect">
@@ -9322,7 +9322,7 @@
                 </a:solidFill>
                 <a:latin typeface="Century Schoolbook"/>
               </a:rPr>
-              <a:t>50</a:t>
+              <a:t>146</a:t>
             </a:r>
           </a:p>
         </p:txBody>
@@ -9366,7 +9366,7 @@
                 </a:solidFill>
                 <a:latin typeface="Century Schoolbook"/>
               </a:rPr>
-              <a:t>80</a:t>
+              <a:t>50</a:t>
             </a:r>
           </a:p>
         </p:txBody>
@@ -9410,7 +9410,7 @@
                 </a:solidFill>
                 <a:latin typeface="Century Schoolbook"/>
               </a:rPr>
-              <a:t>146</a:t>
+              <a:t>26</a:t>
             </a:r>
           </a:p>
         </p:txBody>
@@ -9454,7 +9454,7 @@
                 </a:solidFill>
                 <a:latin typeface="Century Schoolbook"/>
               </a:rPr>
-              <a:t>26</a:t>
+              <a:t>80</a:t>
             </a:r>
           </a:p>
         </p:txBody>
@@ -9759,7 +9759,7 @@
       </p:sp>
       <p:pic>
         <p:nvPicPr>
-          <p:cNvPr id="9" name="Picture 8" descr="0e9d178742cadf8a.png"/>
+          <p:cNvPr id="9" name="Picture 8" descr="d34694b9b55f634e.png"/>
           <p:cNvPicPr>
             <a:picLocks noChangeAspect="1"/>
           </p:cNvPicPr>
@@ -9773,8 +9773,8 @@
         </p:blipFill>
         <p:spPr>
           <a:xfrm>
-            <a:off x="5394959" y="2132076"/>
-            <a:ext cx="1371600" cy="353568"/>
+            <a:off x="5394959" y="2133599"/>
+            <a:ext cx="1371600" cy="350520"/>
           </a:xfrm>
           <a:prstGeom prst="rect">
             <a:avLst/>
@@ -9842,20 +9842,20 @@
             <a:r>
               <a:rPr sz="2400" b="1" i="0">
                 <a:solidFill>
-                  <a:srgbClr val="9E1B32"/>
+                  <a:srgbClr val="1A1A1A"/>
                 </a:solidFill>
                 <a:latin typeface="Century Schoolbook"/>
               </a:rPr>
               <a:t>A.   </a:t>
             </a:r>
             <a:r>
-              <a:rPr sz="2400" b="1" i="0">
-                <a:solidFill>
-                  <a:srgbClr val="9E1B32"/>
-                </a:solidFill>
-                <a:latin typeface="Century Schoolbook"/>
-              </a:rPr>
-              <a:t>50</a:t>
+              <a:rPr sz="2400" b="0" i="0">
+                <a:solidFill>
+                  <a:srgbClr val="1A1A1A"/>
+                </a:solidFill>
+                <a:latin typeface="Century Schoolbook"/>
+              </a:rPr>
+              <a:t>146</a:t>
             </a:r>
           </a:p>
         </p:txBody>
@@ -9886,20 +9886,20 @@
             <a:r>
               <a:rPr sz="2400" b="1" i="0">
                 <a:solidFill>
-                  <a:srgbClr val="1A1A1A"/>
+                  <a:srgbClr val="9E1B32"/>
                 </a:solidFill>
                 <a:latin typeface="Century Schoolbook"/>
               </a:rPr>
               <a:t>B.   </a:t>
             </a:r>
             <a:r>
-              <a:rPr sz="2400" b="0" i="0">
-                <a:solidFill>
-                  <a:srgbClr val="1A1A1A"/>
-                </a:solidFill>
-                <a:latin typeface="Century Schoolbook"/>
-              </a:rPr>
-              <a:t>80</a:t>
+              <a:rPr sz="2400" b="1" i="0">
+                <a:solidFill>
+                  <a:srgbClr val="9E1B32"/>
+                </a:solidFill>
+                <a:latin typeface="Century Schoolbook"/>
+              </a:rPr>
+              <a:t>50</a:t>
             </a:r>
           </a:p>
         </p:txBody>
@@ -9943,7 +9943,7 @@
                 </a:solidFill>
                 <a:latin typeface="Century Schoolbook"/>
               </a:rPr>
-              <a:t>146</a:t>
+              <a:t>26</a:t>
             </a:r>
           </a:p>
         </p:txBody>
@@ -9987,7 +9987,7 @@
                 </a:solidFill>
                 <a:latin typeface="Century Schoolbook"/>
               </a:rPr>
-              <a:t>26</a:t>
+              <a:t>80</a:t>
             </a:r>
           </a:p>
         </p:txBody>
@@ -10022,7 +10022,7 @@
                 </a:solidFill>
                 <a:latin typeface="Century Schoolbook"/>
               </a:rPr>
-              <a:t>Answer:   A — 50</a:t>
+              <a:t>Answer:   B — 50</a:t>
             </a:r>
           </a:p>
         </p:txBody>
@@ -10292,7 +10292,7 @@
       </p:sp>
       <p:pic>
         <p:nvPicPr>
-          <p:cNvPr id="9" name="Picture 8" descr="33871d1afe5a4a1a.png"/>
+          <p:cNvPr id="9" name="Picture 8" descr="076eeeb065b72033.png"/>
           <p:cNvPicPr>
             <a:picLocks noChangeAspect="1"/>
           </p:cNvPicPr>
@@ -10306,8 +10306,8 @@
         </p:blipFill>
         <p:spPr>
           <a:xfrm>
-            <a:off x="5739384" y="2194560"/>
-            <a:ext cx="682752" cy="600456"/>
+            <a:off x="5594604" y="2194560"/>
+            <a:ext cx="972311" cy="804672"/>
           </a:xfrm>
           <a:prstGeom prst="rect">
             <a:avLst/>
@@ -10322,7 +10322,7 @@
         </p:nvSpPr>
         <p:spPr>
           <a:xfrm>
-            <a:off x="777240" y="3069336"/>
+            <a:off x="777240" y="3273551"/>
             <a:ext cx="10607040" cy="465151"/>
           </a:xfrm>
           <a:prstGeom prst="rect">
@@ -10357,7 +10357,7 @@
         </p:nvSpPr>
         <p:spPr>
           <a:xfrm>
-            <a:off x="1874519" y="3735655"/>
+            <a:off x="1874519" y="3939871"/>
             <a:ext cx="4572000" cy="548640"/>
           </a:xfrm>
           <a:prstGeom prst="rect">
@@ -10401,7 +10401,7 @@
         </p:nvSpPr>
         <p:spPr>
           <a:xfrm>
-            <a:off x="6629400" y="3735655"/>
+            <a:off x="6629400" y="3939871"/>
             <a:ext cx="4572000" cy="548640"/>
           </a:xfrm>
           <a:prstGeom prst="rect">
@@ -10445,7 +10445,7 @@
         </p:nvSpPr>
         <p:spPr>
           <a:xfrm>
-            <a:off x="1874519" y="4421455"/>
+            <a:off x="1874519" y="4625671"/>
             <a:ext cx="4572000" cy="548640"/>
           </a:xfrm>
           <a:prstGeom prst="rect">
@@ -10489,7 +10489,7 @@
         </p:nvSpPr>
         <p:spPr>
           <a:xfrm>
-            <a:off x="6629400" y="4421455"/>
+            <a:off x="6629400" y="4625671"/>
             <a:ext cx="4572000" cy="548640"/>
           </a:xfrm>
           <a:prstGeom prst="rect">
@@ -10533,7 +10533,7 @@
         </p:nvSpPr>
         <p:spPr>
           <a:xfrm>
-            <a:off x="777240" y="5427295"/>
+            <a:off x="777240" y="5631511"/>
             <a:ext cx="10607040" cy="457200"/>
           </a:xfrm>
           <a:prstGeom prst="rect">
@@ -10825,7 +10825,7 @@
       </p:sp>
       <p:pic>
         <p:nvPicPr>
-          <p:cNvPr id="9" name="Picture 8" descr="33871d1afe5a4a1a.png"/>
+          <p:cNvPr id="9" name="Picture 8" descr="db4460c0abb0f5ed.png"/>
           <p:cNvPicPr>
             <a:picLocks noChangeAspect="1"/>
           </p:cNvPicPr>
@@ -10839,8 +10839,8 @@
         </p:blipFill>
         <p:spPr>
           <a:xfrm>
-            <a:off x="5739384" y="2103120"/>
-            <a:ext cx="682752" cy="600456"/>
+            <a:off x="5596127" y="2103120"/>
+            <a:ext cx="969264" cy="801624"/>
           </a:xfrm>
           <a:prstGeom prst="rect">
             <a:avLst/>
@@ -10855,7 +10855,7 @@
         </p:nvSpPr>
         <p:spPr>
           <a:xfrm>
-            <a:off x="777240" y="2977895"/>
+            <a:off x="777240" y="3179064"/>
             <a:ext cx="10607040" cy="465151"/>
           </a:xfrm>
           <a:prstGeom prst="rect">
@@ -10890,7 +10890,7 @@
         </p:nvSpPr>
         <p:spPr>
           <a:xfrm>
-            <a:off x="1874519" y="3644215"/>
+            <a:off x="1874519" y="3845383"/>
             <a:ext cx="4572000" cy="548640"/>
           </a:xfrm>
           <a:prstGeom prst="rect">
@@ -10934,7 +10934,7 @@
         </p:nvSpPr>
         <p:spPr>
           <a:xfrm>
-            <a:off x="6629400" y="3644215"/>
+            <a:off x="6629400" y="3845383"/>
             <a:ext cx="4572000" cy="548640"/>
           </a:xfrm>
           <a:prstGeom prst="rect">
@@ -10978,7 +10978,7 @@
         </p:nvSpPr>
         <p:spPr>
           <a:xfrm>
-            <a:off x="1874519" y="4330015"/>
+            <a:off x="1874519" y="4531183"/>
             <a:ext cx="4572000" cy="548640"/>
           </a:xfrm>
           <a:prstGeom prst="rect">
@@ -11022,7 +11022,7 @@
         </p:nvSpPr>
         <p:spPr>
           <a:xfrm>
-            <a:off x="6629400" y="4330015"/>
+            <a:off x="6629400" y="4531183"/>
             <a:ext cx="4572000" cy="548640"/>
           </a:xfrm>
           <a:prstGeom prst="rect">
@@ -11066,7 +11066,7 @@
         </p:nvSpPr>
         <p:spPr>
           <a:xfrm>
-            <a:off x="777240" y="5335855"/>
+            <a:off x="777240" y="5537023"/>
             <a:ext cx="10607040" cy="548640"/>
           </a:xfrm>
           <a:prstGeom prst="rect">
@@ -11715,7 +11715,7 @@
       </p:sp>
       <p:pic>
         <p:nvPicPr>
-          <p:cNvPr id="9" name="Picture 8" descr="d135167dce315e91.png"/>
+          <p:cNvPr id="9" name="Picture 8" descr="43cce3e34e7bfbfb.png"/>
           <p:cNvPicPr>
             <a:picLocks noChangeAspect="1"/>
           </p:cNvPicPr>
@@ -11729,8 +11729,8 @@
         </p:blipFill>
         <p:spPr>
           <a:xfrm>
-            <a:off x="5123687" y="2104643"/>
-            <a:ext cx="1914144" cy="408432"/>
+            <a:off x="5122164" y="2106168"/>
+            <a:ext cx="1917192" cy="405384"/>
           </a:xfrm>
           <a:prstGeom prst="rect">
             <a:avLst/>
@@ -12072,7 +12072,7 @@
       </p:sp>
       <p:pic>
         <p:nvPicPr>
-          <p:cNvPr id="9" name="Picture 8" descr="b12816ac4480e693.png"/>
+          <p:cNvPr id="9" name="Picture 8" descr="cafb332c72f7d831.png"/>
           <p:cNvPicPr>
             <a:picLocks noChangeAspect="1"/>
           </p:cNvPicPr>
@@ -12086,8 +12086,8 @@
         </p:blipFill>
         <p:spPr>
           <a:xfrm>
-            <a:off x="4879847" y="2194560"/>
-            <a:ext cx="2401824" cy="515112"/>
+            <a:off x="4794503" y="2194560"/>
+            <a:ext cx="2572512" cy="676656"/>
           </a:xfrm>
           <a:prstGeom prst="rect">
             <a:avLst/>
@@ -12436,7 +12436,7 @@
         <p:spPr>
           <a:xfrm>
             <a:off x="1874519" y="1760220"/>
-            <a:ext cx="969771" cy="457200"/>
+            <a:ext cx="720605" cy="457200"/>
           </a:xfrm>
           <a:prstGeom prst="rect">
             <a:avLst/>
@@ -12445,7 +12445,7 @@
         </p:spPr>
         <p:txBody>
           <a:bodyPr wrap="none" lIns="45720" rIns="45720" tIns="18288" bIns="18288" anchor="ctr">
-            <a:spAutoFit/>
+            <a:noAutofit/>
           </a:bodyPr>
           <a:lstStyle/>
           <a:p>
@@ -12478,7 +12478,7 @@
         </p:blipFill>
         <p:spPr>
           <a:xfrm>
-            <a:off x="2707132" y="1784604"/>
+            <a:off x="2457965" y="1784604"/>
             <a:ext cx="1143000" cy="408432"/>
           </a:xfrm>
           <a:prstGeom prst="rect">
@@ -12494,8 +12494,8 @@
         </p:nvSpPr>
         <p:spPr>
           <a:xfrm>
-            <a:off x="4398772" y="1760220"/>
-            <a:ext cx="379729" cy="457200"/>
+            <a:off x="4149605" y="1760220"/>
+            <a:ext cx="388052" cy="457200"/>
           </a:xfrm>
           <a:prstGeom prst="rect">
             <a:avLst/>
@@ -12504,7 +12504,7 @@
         </p:spPr>
         <p:txBody>
           <a:bodyPr wrap="none" lIns="45720" rIns="45720" tIns="18288" bIns="18288" anchor="ctr">
-            <a:spAutoFit/>
+            <a:noAutofit/>
           </a:bodyPr>
           <a:lstStyle/>
           <a:p>
@@ -12530,7 +12530,7 @@
         <p:spPr>
           <a:xfrm>
             <a:off x="1874519" y="2372868"/>
-            <a:ext cx="7501128" cy="457200"/>
+            <a:ext cx="6812791" cy="457200"/>
           </a:xfrm>
           <a:prstGeom prst="rect">
             <a:avLst/>
@@ -12539,7 +12539,7 @@
         </p:spPr>
         <p:txBody>
           <a:bodyPr wrap="none" lIns="45720" rIns="45720" tIns="18288" bIns="18288" anchor="ctr">
-            <a:spAutoFit/>
+            <a:noAutofit/>
           </a:bodyPr>
           <a:lstStyle/>
           <a:p>
@@ -12564,8 +12564,8 @@
         </p:nvSpPr>
         <p:spPr>
           <a:xfrm>
-            <a:off x="9787127" y="2372868"/>
-            <a:ext cx="379729" cy="457200"/>
+            <a:off x="9098791" y="2372868"/>
+            <a:ext cx="388052" cy="457200"/>
           </a:xfrm>
           <a:prstGeom prst="rect">
             <a:avLst/>
@@ -12574,7 +12574,7 @@
         </p:spPr>
         <p:txBody>
           <a:bodyPr wrap="none" lIns="45720" rIns="45720" tIns="18288" bIns="18288" anchor="ctr">
-            <a:spAutoFit/>
+            <a:noAutofit/>
           </a:bodyPr>
           <a:lstStyle/>
           <a:p>
@@ -12599,8 +12599,8 @@
         </p:nvSpPr>
         <p:spPr>
           <a:xfrm>
-            <a:off x="1874519" y="2990088"/>
-            <a:ext cx="3551936" cy="457200"/>
+            <a:off x="1874519" y="3057144"/>
+            <a:ext cx="3064939" cy="457200"/>
           </a:xfrm>
           <a:prstGeom prst="rect">
             <a:avLst/>
@@ -12609,7 +12609,7 @@
         </p:spPr>
         <p:txBody>
           <a:bodyPr wrap="none" lIns="45720" rIns="45720" tIns="18288" bIns="18288" anchor="ctr">
-            <a:spAutoFit/>
+            <a:noAutofit/>
           </a:bodyPr>
           <a:lstStyle/>
           <a:p>
@@ -12628,7 +12628,7 @@
       </p:sp>
       <p:pic>
         <p:nvPicPr>
-          <p:cNvPr id="15" name="Picture 14" descr="fb6a4badbefdb6e3.png"/>
+          <p:cNvPr id="15" name="Picture 14" descr="70fd4f7c195b27fd.png"/>
           <p:cNvPicPr>
             <a:picLocks noChangeAspect="1"/>
           </p:cNvPicPr>
@@ -12642,8 +12642,8 @@
         </p:blipFill>
         <p:spPr>
           <a:xfrm>
-            <a:off x="5289296" y="3008376"/>
-            <a:ext cx="701040" cy="420624"/>
+            <a:off x="4802299" y="3008376"/>
+            <a:ext cx="795528" cy="554736"/>
           </a:xfrm>
           <a:prstGeom prst="rect">
             <a:avLst/>
@@ -12658,8 +12658,8 @@
         </p:nvSpPr>
         <p:spPr>
           <a:xfrm>
-            <a:off x="6538976" y="2985516"/>
-            <a:ext cx="718566" cy="457200"/>
+            <a:off x="6146467" y="2985516"/>
+            <a:ext cx="651876" cy="457200"/>
           </a:xfrm>
           <a:prstGeom prst="rect">
             <a:avLst/>
@@ -12668,7 +12668,7 @@
         </p:spPr>
         <p:txBody>
           <a:bodyPr wrap="none" lIns="45720" rIns="45720" tIns="18288" bIns="18288" anchor="ctr">
-            <a:spAutoFit/>
+            <a:noAutofit/>
           </a:bodyPr>
           <a:lstStyle/>
           <a:p>
@@ -12693,8 +12693,8 @@
         </p:nvSpPr>
         <p:spPr>
           <a:xfrm>
-            <a:off x="1874519" y="3607308"/>
-            <a:ext cx="2640584" cy="457200"/>
+            <a:off x="1874519" y="3741420"/>
+            <a:ext cx="2276518" cy="457200"/>
           </a:xfrm>
           <a:prstGeom prst="rect">
             <a:avLst/>
@@ -12703,7 +12703,7 @@
         </p:spPr>
         <p:txBody>
           <a:bodyPr wrap="none" lIns="45720" rIns="45720" tIns="18288" bIns="18288" anchor="ctr">
-            <a:spAutoFit/>
+            <a:noAutofit/>
           </a:bodyPr>
           <a:lstStyle/>
           <a:p>
@@ -12736,7 +12736,7 @@
         </p:blipFill>
         <p:spPr>
           <a:xfrm>
-            <a:off x="4377944" y="3720084"/>
+            <a:off x="4013878" y="3854196"/>
             <a:ext cx="1088136" cy="231648"/>
           </a:xfrm>
           <a:prstGeom prst="rect">
@@ -12752,8 +12752,8 @@
         </p:nvSpPr>
         <p:spPr>
           <a:xfrm>
-            <a:off x="6014720" y="3607308"/>
-            <a:ext cx="379729" cy="457200"/>
+            <a:off x="5650654" y="3741420"/>
+            <a:ext cx="388052" cy="457200"/>
           </a:xfrm>
           <a:prstGeom prst="rect">
             <a:avLst/>
@@ -12762,7 +12762,7 @@
         </p:spPr>
         <p:txBody>
           <a:bodyPr wrap="none" lIns="45720" rIns="45720" tIns="18288" bIns="18288" anchor="ctr">
-            <a:spAutoFit/>
+            <a:noAutofit/>
           </a:bodyPr>
           <a:lstStyle/>
           <a:p>
@@ -13044,7 +13044,7 @@
       </p:sp>
       <p:pic>
         <p:nvPicPr>
-          <p:cNvPr id="9" name="Picture 8" descr="b12816ac4480e693.png"/>
+          <p:cNvPr id="9" name="Picture 8" descr="11864b2915a66941.png"/>
           <p:cNvPicPr>
             <a:picLocks noChangeAspect="1"/>
           </p:cNvPicPr>
@@ -13058,8 +13058,8 @@
         </p:blipFill>
         <p:spPr>
           <a:xfrm>
-            <a:off x="4879847" y="2103120"/>
-            <a:ext cx="2401824" cy="515112"/>
+            <a:off x="4792980" y="2103120"/>
+            <a:ext cx="2575560" cy="676656"/>
           </a:xfrm>
           <a:prstGeom prst="rect">
             <a:avLst/>
@@ -13074,7 +13074,7 @@
         </p:nvSpPr>
         <p:spPr>
           <a:xfrm>
-            <a:off x="1828800" y="2938271"/>
+            <a:off x="1828800" y="3099815"/>
             <a:ext cx="8503920" cy="548640"/>
           </a:xfrm>
           <a:prstGeom prst="rect">
@@ -13407,8 +13407,8 @@
         </p:nvSpPr>
         <p:spPr>
           <a:xfrm>
-            <a:off x="1674876" y="2232660"/>
-            <a:ext cx="3300984" cy="457200"/>
+            <a:off x="2041691" y="2232660"/>
+            <a:ext cx="3068147" cy="457200"/>
           </a:xfrm>
           <a:prstGeom prst="rect">
             <a:avLst/>
@@ -13417,7 +13417,7 @@
         </p:spPr>
         <p:txBody>
           <a:bodyPr wrap="none" lIns="45720" rIns="45720" tIns="18288" bIns="18288" anchor="ctr">
-            <a:spAutoFit/>
+            <a:noAutofit/>
           </a:bodyPr>
           <a:lstStyle/>
           <a:p>
@@ -13450,7 +13450,7 @@
         </p:blipFill>
         <p:spPr>
           <a:xfrm>
-            <a:off x="4838699" y="2194560"/>
+            <a:off x="4972679" y="2194560"/>
             <a:ext cx="1969008" cy="533400"/>
           </a:xfrm>
           <a:prstGeom prst="rect">
@@ -13466,8 +13466,8 @@
         </p:nvSpPr>
         <p:spPr>
           <a:xfrm>
-            <a:off x="6807707" y="2232660"/>
-            <a:ext cx="3816096" cy="457200"/>
+            <a:off x="6941687" y="2232660"/>
+            <a:ext cx="3315301" cy="457200"/>
           </a:xfrm>
           <a:prstGeom prst="rect">
             <a:avLst/>
@@ -13476,7 +13476,7 @@
         </p:spPr>
         <p:txBody>
           <a:bodyPr wrap="none" lIns="45720" rIns="45720" tIns="18288" bIns="18288" anchor="ctr">
-            <a:spAutoFit/>
+            <a:noAutofit/>
           </a:bodyPr>
           <a:lstStyle/>
           <a:p>
@@ -13536,8 +13536,8 @@
         </p:nvSpPr>
         <p:spPr>
           <a:xfrm>
-            <a:off x="1962404" y="3554299"/>
-            <a:ext cx="5189728" cy="457200"/>
+            <a:off x="2513913" y="3554299"/>
+            <a:ext cx="4641360" cy="457200"/>
           </a:xfrm>
           <a:prstGeom prst="rect">
             <a:avLst/>
@@ -13546,7 +13546,7 @@
         </p:spPr>
         <p:txBody>
           <a:bodyPr wrap="none" lIns="45720" rIns="45720" tIns="18288" bIns="18288" anchor="ctr">
-            <a:spAutoFit/>
+            <a:noAutofit/>
           </a:bodyPr>
           <a:lstStyle/>
           <a:p>
@@ -13579,7 +13579,7 @@
         </p:blipFill>
         <p:spPr>
           <a:xfrm>
-            <a:off x="7014972" y="3691459"/>
+            <a:off x="7018114" y="3691459"/>
             <a:ext cx="192024" cy="182880"/>
           </a:xfrm>
           <a:prstGeom prst="rect">
@@ -13595,8 +13595,8 @@
         </p:nvSpPr>
         <p:spPr>
           <a:xfrm>
-            <a:off x="7206996" y="3554299"/>
-            <a:ext cx="3129280" cy="457200"/>
+            <a:off x="7210138" y="3554299"/>
+            <a:ext cx="2574628" cy="457200"/>
           </a:xfrm>
           <a:prstGeom prst="rect">
             <a:avLst/>
@@ -13605,7 +13605,7 @@
         </p:spPr>
         <p:txBody>
           <a:bodyPr wrap="none" lIns="45720" rIns="45720" tIns="18288" bIns="18288" anchor="ctr">
-            <a:spAutoFit/>
+            <a:noAutofit/>
           </a:bodyPr>
           <a:lstStyle/>
           <a:p>
@@ -13963,8 +13963,8 @@
         </p:nvSpPr>
         <p:spPr>
           <a:xfrm>
-            <a:off x="1674876" y="2141219"/>
-            <a:ext cx="3300984" cy="457200"/>
+            <a:off x="2041691" y="2139696"/>
+            <a:ext cx="3068147" cy="457200"/>
           </a:xfrm>
           <a:prstGeom prst="rect">
             <a:avLst/>
@@ -13973,7 +13973,7 @@
         </p:spPr>
         <p:txBody>
           <a:bodyPr wrap="none" lIns="45720" rIns="45720" tIns="18288" bIns="18288" anchor="ctr">
-            <a:spAutoFit/>
+            <a:noAutofit/>
           </a:bodyPr>
           <a:lstStyle/>
           <a:p>
@@ -13992,7 +13992,7 @@
       </p:sp>
       <p:pic>
         <p:nvPicPr>
-          <p:cNvPr id="10" name="Picture 9" descr="71ab7e8131bab814.png"/>
+          <p:cNvPr id="10" name="Picture 9" descr="3cbcfcb039974770.png"/>
           <p:cNvPicPr>
             <a:picLocks noChangeAspect="1"/>
           </p:cNvPicPr>
@@ -14006,8 +14006,8 @@
         </p:blipFill>
         <p:spPr>
           <a:xfrm>
-            <a:off x="4838699" y="2103120"/>
-            <a:ext cx="1969008" cy="533400"/>
+            <a:off x="4972679" y="2103120"/>
+            <a:ext cx="1969008" cy="530352"/>
           </a:xfrm>
           <a:prstGeom prst="rect">
             <a:avLst/>
@@ -14022,8 +14022,8 @@
         </p:nvSpPr>
         <p:spPr>
           <a:xfrm>
-            <a:off x="6807707" y="2141219"/>
-            <a:ext cx="3816096" cy="457200"/>
+            <a:off x="6941687" y="2139696"/>
+            <a:ext cx="3315301" cy="457200"/>
           </a:xfrm>
           <a:prstGeom prst="rect">
             <a:avLst/>
@@ -14032,7 +14032,7 @@
         </p:spPr>
         <p:txBody>
           <a:bodyPr wrap="none" lIns="45720" rIns="45720" tIns="18288" bIns="18288" anchor="ctr">
-            <a:spAutoFit/>
+            <a:noAutofit/>
           </a:bodyPr>
           <a:lstStyle/>
           <a:p>
@@ -14057,7 +14057,7 @@
         </p:nvSpPr>
         <p:spPr>
           <a:xfrm>
-            <a:off x="777240" y="2910840"/>
+            <a:off x="777240" y="2907791"/>
             <a:ext cx="10607040" cy="465151"/>
           </a:xfrm>
           <a:prstGeom prst="rect">
@@ -14092,8 +14092,8 @@
         </p:nvSpPr>
         <p:spPr>
           <a:xfrm>
-            <a:off x="1962404" y="3462859"/>
-            <a:ext cx="5189728" cy="457200"/>
+            <a:off x="2513913" y="3459811"/>
+            <a:ext cx="4641360" cy="457200"/>
           </a:xfrm>
           <a:prstGeom prst="rect">
             <a:avLst/>
@@ -14102,7 +14102,7 @@
         </p:spPr>
         <p:txBody>
           <a:bodyPr wrap="none" lIns="45720" rIns="45720" tIns="18288" bIns="18288" anchor="ctr">
-            <a:spAutoFit/>
+            <a:noAutofit/>
           </a:bodyPr>
           <a:lstStyle/>
           <a:p>
@@ -14135,7 +14135,7 @@
         </p:blipFill>
         <p:spPr>
           <a:xfrm>
-            <a:off x="7014972" y="3600019"/>
+            <a:off x="7018114" y="3596971"/>
             <a:ext cx="192024" cy="182880"/>
           </a:xfrm>
           <a:prstGeom prst="rect">
@@ -14151,8 +14151,8 @@
         </p:nvSpPr>
         <p:spPr>
           <a:xfrm>
-            <a:off x="7206996" y="3462859"/>
-            <a:ext cx="3129280" cy="457200"/>
+            <a:off x="7210138" y="3459811"/>
+            <a:ext cx="2574628" cy="457200"/>
           </a:xfrm>
           <a:prstGeom prst="rect">
             <a:avLst/>
@@ -14161,7 +14161,7 @@
         </p:spPr>
         <p:txBody>
           <a:bodyPr wrap="none" lIns="45720" rIns="45720" tIns="18288" bIns="18288" anchor="ctr">
-            <a:spAutoFit/>
+            <a:noAutofit/>
           </a:bodyPr>
           <a:lstStyle/>
           <a:p>
@@ -14186,7 +14186,7 @@
         </p:nvSpPr>
         <p:spPr>
           <a:xfrm>
-            <a:off x="1828800" y="4217239"/>
+            <a:off x="1828800" y="4214191"/>
             <a:ext cx="8503920" cy="548640"/>
           </a:xfrm>
           <a:prstGeom prst="rect">
@@ -14221,7 +14221,7 @@
         </p:nvSpPr>
         <p:spPr>
           <a:xfrm>
-            <a:off x="777240" y="4948759"/>
+            <a:off x="777240" y="4945711"/>
             <a:ext cx="10607040" cy="548640"/>
           </a:xfrm>
           <a:prstGeom prst="rect">
@@ -16665,7 +16665,7 @@
       </p:cxnSp>
       <p:pic>
         <p:nvPicPr>
-          <p:cNvPr id="10" name="Picture 9" descr="685a6188b74d5155.png"/>
+          <p:cNvPr id="10" name="Picture 9" descr="e75470b2ad78cf1c.png"/>
           <p:cNvPicPr>
             <a:picLocks noChangeAspect="1"/>
           </p:cNvPicPr>
@@ -16679,7 +16679,7 @@
         </p:blipFill>
         <p:spPr>
           <a:xfrm>
-            <a:off x="2609595" y="2406396"/>
+            <a:off x="2928001" y="2406396"/>
             <a:ext cx="2962656" cy="280416"/>
           </a:xfrm>
           <a:prstGeom prst="rect">
@@ -16695,8 +16695,8 @@
         </p:nvSpPr>
         <p:spPr>
           <a:xfrm>
-            <a:off x="5572252" y="2318004"/>
-            <a:ext cx="2614168" cy="457200"/>
+            <a:off x="5890657" y="2318004"/>
+            <a:ext cx="1977357" cy="457200"/>
           </a:xfrm>
           <a:prstGeom prst="rect">
             <a:avLst/>
@@ -16705,7 +16705,7 @@
         </p:spPr>
         <p:txBody>
           <a:bodyPr wrap="none" lIns="45720" rIns="45720" tIns="18288" bIns="18288" anchor="ctr">
-            <a:spAutoFit/>
+            <a:noAutofit/>
           </a:bodyPr>
           <a:lstStyle/>
           <a:p>
@@ -16724,7 +16724,7 @@
       </p:sp>
       <p:pic>
         <p:nvPicPr>
-          <p:cNvPr id="12" name="Picture 11" descr="e89cc2754f656bf4.png"/>
+          <p:cNvPr id="12" name="Picture 11" descr="0c14e80cd2eaab69.png"/>
           <p:cNvPicPr>
             <a:picLocks noChangeAspect="1"/>
           </p:cNvPicPr>
@@ -16738,7 +16738,7 @@
         </p:blipFill>
         <p:spPr>
           <a:xfrm>
-            <a:off x="8049259" y="2403348"/>
+            <a:off x="7730854" y="2403348"/>
             <a:ext cx="1502664" cy="286512"/>
           </a:xfrm>
           <a:prstGeom prst="rect">
@@ -16748,7 +16748,7 @@
       </p:pic>
       <p:pic>
         <p:nvPicPr>
-          <p:cNvPr id="13" name="Picture 12" descr="85d1e53feff52dad.png"/>
+          <p:cNvPr id="13" name="Picture 12" descr="c6cb11828cf70896.png"/>
           <p:cNvPicPr>
             <a:picLocks noChangeAspect="1"/>
           </p:cNvPicPr>
@@ -16762,8 +16762,8 @@
         </p:blipFill>
         <p:spPr>
           <a:xfrm>
-            <a:off x="2403856" y="3083052"/>
-            <a:ext cx="3343656" cy="298704"/>
+            <a:off x="2722261" y="3084576"/>
+            <a:ext cx="3343656" cy="295656"/>
           </a:xfrm>
           <a:prstGeom prst="rect">
             <a:avLst/>
@@ -16778,8 +16778,8 @@
         </p:nvSpPr>
         <p:spPr>
           <a:xfrm>
-            <a:off x="5747512" y="3003804"/>
-            <a:ext cx="2614168" cy="457200"/>
+            <a:off x="6065917" y="3003804"/>
+            <a:ext cx="1977357" cy="457200"/>
           </a:xfrm>
           <a:prstGeom prst="rect">
             <a:avLst/>
@@ -16788,7 +16788,7 @@
         </p:spPr>
         <p:txBody>
           <a:bodyPr wrap="none" lIns="45720" rIns="45720" tIns="18288" bIns="18288" anchor="ctr">
-            <a:spAutoFit/>
+            <a:noAutofit/>
           </a:bodyPr>
           <a:lstStyle/>
           <a:p>
@@ -16807,7 +16807,7 @@
       </p:sp>
       <p:pic>
         <p:nvPicPr>
-          <p:cNvPr id="15" name="Picture 14" descr="5d0dbfdc3ba2bcfb.png"/>
+          <p:cNvPr id="15" name="Picture 14" descr="3d97c3435e5f9260.png"/>
           <p:cNvPicPr>
             <a:picLocks noChangeAspect="1"/>
           </p:cNvPicPr>
@@ -16821,7 +16821,7 @@
         </p:blipFill>
         <p:spPr>
           <a:xfrm>
-            <a:off x="8224520" y="3092196"/>
+            <a:off x="7906114" y="3092196"/>
             <a:ext cx="1533144" cy="280416"/>
           </a:xfrm>
           <a:prstGeom prst="rect">
@@ -17164,7 +17164,7 @@
       </p:cxnSp>
       <p:pic>
         <p:nvPicPr>
-          <p:cNvPr id="10" name="Picture 9" descr="755821c927b6810d.png"/>
+          <p:cNvPr id="10" name="Picture 9" descr="152b1d3b1e5b1c23.png"/>
           <p:cNvPicPr>
             <a:picLocks noChangeAspect="1"/>
           </p:cNvPicPr>
@@ -17178,8 +17178,8 @@
         </p:blipFill>
         <p:spPr>
           <a:xfrm>
-            <a:off x="5079492" y="2340864"/>
-            <a:ext cx="2002536" cy="606552"/>
+            <a:off x="4844796" y="2340864"/>
+            <a:ext cx="2471928" cy="810768"/>
           </a:xfrm>
           <a:prstGeom prst="rect">
             <a:avLst/>
@@ -17188,7 +17188,7 @@
       </p:pic>
       <p:pic>
         <p:nvPicPr>
-          <p:cNvPr id="11" name="Picture 10" descr="355b73be997f1528.png"/>
+          <p:cNvPr id="11" name="Picture 10" descr="ffadcec50e54c83e.png"/>
           <p:cNvPicPr>
             <a:picLocks noChangeAspect="1"/>
           </p:cNvPicPr>
@@ -17202,8 +17202,8 @@
         </p:blipFill>
         <p:spPr>
           <a:xfrm>
-            <a:off x="3822191" y="3221736"/>
-            <a:ext cx="4517136" cy="682752"/>
+            <a:off x="3494532" y="3425952"/>
+            <a:ext cx="5172456" cy="871728"/>
           </a:xfrm>
           <a:prstGeom prst="rect">
             <a:avLst/>
@@ -17218,7 +17218,7 @@
         </p:nvSpPr>
         <p:spPr>
           <a:xfrm>
-            <a:off x="987552" y="4242816"/>
+            <a:off x="987552" y="4636008"/>
             <a:ext cx="10131551" cy="475488"/>
           </a:xfrm>
           <a:prstGeom prst="rect">
@@ -17832,7 +17832,7 @@
       </p:sp>
       <p:pic>
         <p:nvPicPr>
-          <p:cNvPr id="9" name="Picture 8" descr="3a15f3326d8bf66f.png"/>
+          <p:cNvPr id="9" name="Picture 8" descr="353dd49f16316f6f.png"/>
           <p:cNvPicPr>
             <a:picLocks noChangeAspect="1"/>
           </p:cNvPicPr>
@@ -17847,7 +17847,7 @@
         <p:spPr>
           <a:xfrm>
             <a:off x="1828800" y="1920240"/>
-            <a:ext cx="2228088" cy="408432"/>
+            <a:ext cx="2231136" cy="405384"/>
           </a:xfrm>
           <a:prstGeom prst="rect">
             <a:avLst/>
@@ -17862,7 +17862,7 @@
         </p:nvSpPr>
         <p:spPr>
           <a:xfrm>
-            <a:off x="4514088" y="1895856"/>
+            <a:off x="4517136" y="1894332"/>
             <a:ext cx="6400800" cy="502920"/>
           </a:xfrm>
           <a:prstGeom prst="rect">
@@ -17891,7 +17891,7 @@
       </p:sp>
       <p:pic>
         <p:nvPicPr>
-          <p:cNvPr id="11" name="Picture 10" descr="8feabb5e10fcfada.png"/>
+          <p:cNvPr id="11" name="Picture 10" descr="340b208cd1f74313.png"/>
           <p:cNvPicPr>
             <a:picLocks noChangeAspect="1"/>
           </p:cNvPicPr>
@@ -17905,8 +17905,8 @@
         </p:blipFill>
         <p:spPr>
           <a:xfrm>
-            <a:off x="1828800" y="2602992"/>
-            <a:ext cx="6973824" cy="353568"/>
+            <a:off x="1828800" y="2599944"/>
+            <a:ext cx="6973824" cy="350520"/>
           </a:xfrm>
           <a:prstGeom prst="rect">
             <a:avLst/>
@@ -17921,7 +17921,7 @@
         </p:nvSpPr>
         <p:spPr>
           <a:xfrm>
-            <a:off x="9259824" y="2551176"/>
+            <a:off x="9259824" y="2546604"/>
             <a:ext cx="2124455" cy="502920"/>
           </a:xfrm>
           <a:prstGeom prst="rect">
@@ -17950,7 +17950,7 @@
       </p:sp>
       <p:pic>
         <p:nvPicPr>
-          <p:cNvPr id="13" name="Picture 12" descr="11af785c9847d03f.png"/>
+          <p:cNvPr id="13" name="Picture 12" descr="90bf680791a0f62d.png"/>
           <p:cNvPicPr>
             <a:picLocks noChangeAspect="1"/>
           </p:cNvPicPr>
@@ -17964,8 +17964,8 @@
         </p:blipFill>
         <p:spPr>
           <a:xfrm>
-            <a:off x="1828800" y="3230880"/>
-            <a:ext cx="2941320" cy="298704"/>
+            <a:off x="1828800" y="3224783"/>
+            <a:ext cx="2944368" cy="295656"/>
           </a:xfrm>
           <a:prstGeom prst="rect">
             <a:avLst/>
@@ -17980,8 +17980,8 @@
         </p:nvSpPr>
         <p:spPr>
           <a:xfrm>
-            <a:off x="5227320" y="3151631"/>
-            <a:ext cx="6156959" cy="502920"/>
+            <a:off x="5230368" y="3144011"/>
+            <a:ext cx="6153911" cy="502920"/>
           </a:xfrm>
           <a:prstGeom prst="rect">
             <a:avLst/>

--- a/a7/packages/A7 Unit 4 - Solving Problems with Rational Numbers/Slides/A7 4.06  Slides.pptx
+++ b/a7/packages/A7 Unit 4 - Solving Problems with Rational Numbers/Slides/A7 4.06  Slides.pptx
@@ -6335,8 +6335,8 @@
         </p:nvSpPr>
         <p:spPr>
           <a:xfrm>
-            <a:off x="2547164" y="2217420"/>
-            <a:ext cx="3889329" cy="457200"/>
+            <a:off x="1234440" y="1851660"/>
+            <a:ext cx="3606311" cy="457200"/>
           </a:xfrm>
           <a:prstGeom prst="rect">
             <a:avLst/>
@@ -6351,7 +6351,7 @@
           <a:p>
             <a:pPr algn="l"/>
             <a:r>
-              <a:rPr sz="2600" b="0" i="0">
+              <a:rPr sz="2400" b="0" i="0">
                 <a:solidFill>
                   <a:srgbClr val="1A1A1A"/>
                 </a:solidFill>
@@ -6364,7 +6364,7 @@
       </p:sp>
       <p:pic>
         <p:nvPicPr>
-          <p:cNvPr id="10" name="Picture 9" descr="ae9cca3e3cb96ab4.png"/>
+          <p:cNvPr id="10" name="Picture 9" descr="9fe57fc54286b299.png"/>
           <p:cNvPicPr>
             <a:picLocks noChangeAspect="1"/>
           </p:cNvPicPr>
@@ -6378,8 +6378,8 @@
         </p:blipFill>
         <p:spPr>
           <a:xfrm>
-            <a:off x="6299333" y="2194560"/>
-            <a:ext cx="1051560" cy="502920"/>
+            <a:off x="4703591" y="1876043"/>
+            <a:ext cx="853440" cy="408432"/>
           </a:xfrm>
           <a:prstGeom prst="rect">
             <a:avLst/>
@@ -6394,8 +6394,8 @@
         </p:nvSpPr>
         <p:spPr>
           <a:xfrm>
-            <a:off x="7350893" y="2217420"/>
-            <a:ext cx="2400621" cy="457200"/>
+            <a:off x="5557031" y="1851660"/>
+            <a:ext cx="2233818" cy="457200"/>
           </a:xfrm>
           <a:prstGeom prst="rect">
             <a:avLst/>
@@ -6410,13 +6410,13 @@
           <a:p>
             <a:pPr algn="l"/>
             <a:r>
-              <a:rPr sz="2600" b="0" i="0">
+              <a:rPr sz="2400" b="0" i="0">
                 <a:solidFill>
                   <a:srgbClr val="1A1A1A"/>
                 </a:solidFill>
                 <a:latin typeface="Century Schoolbook"/>
               </a:rPr>
-              <a:t>  centimetres.</a:t>
+              <a:t>  centimeters.</a:t>
             </a:r>
           </a:p>
         </p:txBody>
@@ -6429,29 +6429,29 @@
         </p:nvSpPr>
         <p:spPr>
           <a:xfrm>
-            <a:off x="777240" y="2971800"/>
-            <a:ext cx="10607040" cy="465151"/>
-          </a:xfrm>
-          <a:prstGeom prst="rect">
-            <a:avLst/>
-          </a:prstGeom>
-          <a:noFill/>
-        </p:spPr>
-        <p:txBody>
-          <a:bodyPr wrap="square" lIns="45720" rIns="45720" tIns="18288" bIns="18288" anchor="t">
-            <a:spAutoFit/>
-          </a:bodyPr>
-          <a:lstStyle/>
-          <a:p>
-            <a:pPr algn="ctr"/>
-            <a:r>
-              <a:rPr sz="2600" b="0" i="0">
+            <a:off x="1234440" y="2487168"/>
+            <a:ext cx="10058400" cy="429370"/>
+          </a:xfrm>
+          <a:prstGeom prst="rect">
+            <a:avLst/>
+          </a:prstGeom>
+          <a:noFill/>
+        </p:spPr>
+        <p:txBody>
+          <a:bodyPr wrap="square" lIns="45720" rIns="45720" tIns="18288" bIns="18288" anchor="t">
+            <a:spAutoFit/>
+          </a:bodyPr>
+          <a:lstStyle/>
+          <a:p>
+            <a:pPr algn="l"/>
+            <a:r>
+              <a:rPr sz="2400" b="0" i="0">
                 <a:solidFill>
                   <a:srgbClr val="1A1A1A"/>
                 </a:solidFill>
                 <a:latin typeface="Century Schoolbook"/>
               </a:rPr>
-              <a:t>Its diagonal is about 19.8 centimetres.</a:t>
+              <a:t>Its diagonal is about 19.8 centimeters.</a:t>
             </a:r>
           </a:p>
         </p:txBody>
@@ -6464,23 +6464,23 @@
         </p:nvSpPr>
         <p:spPr>
           <a:xfrm>
-            <a:off x="777240" y="3546679"/>
-            <a:ext cx="10607040" cy="465151"/>
-          </a:xfrm>
-          <a:prstGeom prst="rect">
-            <a:avLst/>
-          </a:prstGeom>
-          <a:noFill/>
-        </p:spPr>
-        <p:txBody>
-          <a:bodyPr wrap="square" lIns="45720" rIns="45720" tIns="18288" bIns="18288" anchor="t">
-            <a:spAutoFit/>
-          </a:bodyPr>
-          <a:lstStyle/>
-          <a:p>
-            <a:pPr algn="ctr"/>
-            <a:r>
-              <a:rPr sz="2600" b="0" i="0">
+            <a:off x="1234440" y="3026266"/>
+            <a:ext cx="10058400" cy="429370"/>
+          </a:xfrm>
+          <a:prstGeom prst="rect">
+            <a:avLst/>
+          </a:prstGeom>
+          <a:noFill/>
+        </p:spPr>
+        <p:txBody>
+          <a:bodyPr wrap="square" lIns="45720" rIns="45720" tIns="18288" bIns="18288" anchor="t">
+            <a:spAutoFit/>
+          </a:bodyPr>
+          <a:lstStyle/>
+          <a:p>
+            <a:pPr algn="l"/>
+            <a:r>
+              <a:rPr sz="2400" b="1" i="0">
                 <a:solidFill>
                   <a:srgbClr val="1A1A1A"/>
                 </a:solidFill>
@@ -6522,41 +6522,6 @@
                 <a:latin typeface="Century Schoolbook"/>
               </a:rPr>
               <a:t>Answer it.</a:t>
-            </a:r>
-          </a:p>
-        </p:txBody>
-      </p:sp>
-      <p:sp>
-        <p:nvSpPr>
-          <p:cNvPr id="15" name="TextBox 14"/>
-          <p:cNvSpPr txBox="1"/>
-          <p:nvPr/>
-        </p:nvSpPr>
-        <p:spPr>
-          <a:xfrm>
-            <a:off x="777240" y="4828032"/>
-            <a:ext cx="10607040" cy="365760"/>
-          </a:xfrm>
-          <a:prstGeom prst="rect">
-            <a:avLst/>
-          </a:prstGeom>
-          <a:noFill/>
-        </p:spPr>
-        <p:txBody>
-          <a:bodyPr wrap="square" lIns="45720" rIns="45720" tIns="18288" bIns="18288" anchor="t">
-            <a:spAutoFit/>
-          </a:bodyPr>
-          <a:lstStyle/>
-          <a:p>
-            <a:pPr algn="ctr"/>
-            <a:r>
-              <a:rPr sz="1900" b="0" i="1">
-                <a:solidFill>
-                  <a:srgbClr val="6B6B6B"/>
-                </a:solidFill>
-                <a:latin typeface="Century Schoolbook"/>
-              </a:rPr>
-              <a:t>Find the side, then the perimeter.</a:t>
             </a:r>
           </a:p>
         </p:txBody>
@@ -6832,8 +6797,8 @@
         </p:nvSpPr>
         <p:spPr>
           <a:xfrm>
-            <a:off x="2551736" y="2125979"/>
-            <a:ext cx="3889329" cy="457200"/>
+            <a:off x="1234440" y="1851660"/>
+            <a:ext cx="3606311" cy="457200"/>
           </a:xfrm>
           <a:prstGeom prst="rect">
             <a:avLst/>
@@ -6848,7 +6813,7 @@
           <a:p>
             <a:pPr algn="l"/>
             <a:r>
-              <a:rPr sz="2600" b="0" i="0">
+              <a:rPr sz="2400" b="0" i="0">
                 <a:solidFill>
                   <a:srgbClr val="1A1A1A"/>
                 </a:solidFill>
@@ -6861,7 +6826,7 @@
       </p:sp>
       <p:pic>
         <p:nvPicPr>
-          <p:cNvPr id="10" name="Picture 9" descr="7a82a4f80dc024df.png"/>
+          <p:cNvPr id="10" name="Picture 9" descr="538eaa100b231b86.png"/>
           <p:cNvPicPr>
             <a:picLocks noChangeAspect="1"/>
           </p:cNvPicPr>
@@ -6875,8 +6840,8 @@
         </p:blipFill>
         <p:spPr>
           <a:xfrm>
-            <a:off x="6303905" y="2103120"/>
-            <a:ext cx="1042415" cy="502920"/>
+            <a:off x="4703591" y="1876043"/>
+            <a:ext cx="847344" cy="408432"/>
           </a:xfrm>
           <a:prstGeom prst="rect">
             <a:avLst/>
@@ -6891,8 +6856,8 @@
         </p:nvSpPr>
         <p:spPr>
           <a:xfrm>
-            <a:off x="7346321" y="2125979"/>
-            <a:ext cx="2400621" cy="457200"/>
+            <a:off x="5550935" y="1851660"/>
+            <a:ext cx="2233818" cy="457200"/>
           </a:xfrm>
           <a:prstGeom prst="rect">
             <a:avLst/>
@@ -6907,13 +6872,13 @@
           <a:p>
             <a:pPr algn="l"/>
             <a:r>
-              <a:rPr sz="2600" b="0" i="0">
+              <a:rPr sz="2400" b="0" i="0">
                 <a:solidFill>
                   <a:srgbClr val="1A1A1A"/>
                 </a:solidFill>
                 <a:latin typeface="Century Schoolbook"/>
               </a:rPr>
-              <a:t>  centimetres.</a:t>
+              <a:t>  centimeters.</a:t>
             </a:r>
           </a:p>
         </p:txBody>
@@ -6926,8 +6891,78 @@
         </p:nvSpPr>
         <p:spPr>
           <a:xfrm>
-            <a:off x="777240" y="2880359"/>
-            <a:ext cx="10607040" cy="465151"/>
+            <a:off x="1234440" y="2487168"/>
+            <a:ext cx="10058400" cy="429370"/>
+          </a:xfrm>
+          <a:prstGeom prst="rect">
+            <a:avLst/>
+          </a:prstGeom>
+          <a:noFill/>
+        </p:spPr>
+        <p:txBody>
+          <a:bodyPr wrap="square" lIns="45720" rIns="45720" tIns="18288" bIns="18288" anchor="t">
+            <a:spAutoFit/>
+          </a:bodyPr>
+          <a:lstStyle/>
+          <a:p>
+            <a:pPr algn="l"/>
+            <a:r>
+              <a:rPr sz="2400" b="0" i="0">
+                <a:solidFill>
+                  <a:srgbClr val="1A1A1A"/>
+                </a:solidFill>
+                <a:latin typeface="Century Schoolbook"/>
+              </a:rPr>
+              <a:t>Its diagonal is about 19.8 centimeters.</a:t>
+            </a:r>
+          </a:p>
+        </p:txBody>
+      </p:sp>
+      <p:sp>
+        <p:nvSpPr>
+          <p:cNvPr id="13" name="TextBox 12"/>
+          <p:cNvSpPr txBox="1"/>
+          <p:nvPr/>
+        </p:nvSpPr>
+        <p:spPr>
+          <a:xfrm>
+            <a:off x="1234440" y="3026266"/>
+            <a:ext cx="10058400" cy="429370"/>
+          </a:xfrm>
+          <a:prstGeom prst="rect">
+            <a:avLst/>
+          </a:prstGeom>
+          <a:noFill/>
+        </p:spPr>
+        <p:txBody>
+          <a:bodyPr wrap="square" lIns="45720" rIns="45720" tIns="18288" bIns="18288" anchor="t">
+            <a:spAutoFit/>
+          </a:bodyPr>
+          <a:lstStyle/>
+          <a:p>
+            <a:pPr algn="l"/>
+            <a:r>
+              <a:rPr sz="2400" b="1" i="0">
+                <a:solidFill>
+                  <a:srgbClr val="1A1A1A"/>
+                </a:solidFill>
+                <a:latin typeface="Century Schoolbook"/>
+              </a:rPr>
+              <a:t>What is the perimeter of the tile?</a:t>
+            </a:r>
+          </a:p>
+        </p:txBody>
+      </p:sp>
+      <p:sp>
+        <p:nvSpPr>
+          <p:cNvPr id="14" name="TextBox 13"/>
+          <p:cNvSpPr txBox="1"/>
+          <p:nvPr/>
+        </p:nvSpPr>
+        <p:spPr>
+          <a:xfrm>
+            <a:off x="1828800" y="3656804"/>
+            <a:ext cx="8503920" cy="548640"/>
           </a:xfrm>
           <a:prstGeom prst="rect">
             <a:avLst/>
@@ -6942,27 +6977,27 @@
           <a:p>
             <a:pPr algn="ctr"/>
             <a:r>
-              <a:rPr sz="2600" b="0" i="0">
-                <a:solidFill>
-                  <a:srgbClr val="1A1A1A"/>
-                </a:solidFill>
-                <a:latin typeface="Century Schoolbook"/>
-              </a:rPr>
-              <a:t>Its diagonal is about 19.8 centimetres.</a:t>
-            </a:r>
-          </a:p>
-        </p:txBody>
-      </p:sp>
-      <p:sp>
-        <p:nvSpPr>
-          <p:cNvPr id="13" name="TextBox 12"/>
-          <p:cNvSpPr txBox="1"/>
-          <p:nvPr/>
-        </p:nvSpPr>
-        <p:spPr>
-          <a:xfrm>
-            <a:off x="777240" y="3455239"/>
-            <a:ext cx="10607040" cy="465151"/>
+              <a:rPr sz="2400" b="0" i="0">
+                <a:solidFill>
+                  <a:srgbClr val="6B6B6B"/>
+                </a:solidFill>
+                <a:latin typeface="Century Schoolbook"/>
+              </a:rPr>
+              <a:t>4 sides of 14</a:t>
+            </a:r>
+          </a:p>
+        </p:txBody>
+      </p:sp>
+      <p:sp>
+        <p:nvSpPr>
+          <p:cNvPr id="15" name="TextBox 14"/>
+          <p:cNvSpPr txBox="1"/>
+          <p:nvPr/>
+        </p:nvSpPr>
+        <p:spPr>
+          <a:xfrm>
+            <a:off x="777240" y="4663440"/>
+            <a:ext cx="10607040" cy="548640"/>
           </a:xfrm>
           <a:prstGeom prst="rect">
             <a:avLst/>
@@ -6977,83 +7012,13 @@
           <a:p>
             <a:pPr algn="ctr"/>
             <a:r>
-              <a:rPr sz="2600" b="0" i="0">
-                <a:solidFill>
-                  <a:srgbClr val="1A1A1A"/>
-                </a:solidFill>
-                <a:latin typeface="Century Schoolbook"/>
-              </a:rPr>
-              <a:t>What is the perimeter of the tile?</a:t>
-            </a:r>
-          </a:p>
-        </p:txBody>
-      </p:sp>
-      <p:sp>
-        <p:nvSpPr>
-          <p:cNvPr id="14" name="TextBox 13"/>
-          <p:cNvSpPr txBox="1"/>
-          <p:nvPr/>
-        </p:nvSpPr>
-        <p:spPr>
-          <a:xfrm>
-            <a:off x="1828800" y="4075838"/>
-            <a:ext cx="8503920" cy="548640"/>
-          </a:xfrm>
-          <a:prstGeom prst="rect">
-            <a:avLst/>
-          </a:prstGeom>
-          <a:noFill/>
-        </p:spPr>
-        <p:txBody>
-          <a:bodyPr wrap="square" lIns="45720" rIns="45720" tIns="18288" bIns="18288" anchor="t">
-            <a:spAutoFit/>
-          </a:bodyPr>
-          <a:lstStyle/>
-          <a:p>
-            <a:pPr algn="ctr"/>
-            <a:r>
-              <a:rPr sz="2400" b="0" i="0">
-                <a:solidFill>
-                  <a:srgbClr val="6B6B6B"/>
-                </a:solidFill>
-                <a:latin typeface="Century Schoolbook"/>
-              </a:rPr>
-              <a:t>4 sides of 14</a:t>
-            </a:r>
-          </a:p>
-        </p:txBody>
-      </p:sp>
-      <p:sp>
-        <p:nvSpPr>
-          <p:cNvPr id="15" name="TextBox 14"/>
-          <p:cNvSpPr txBox="1"/>
-          <p:nvPr/>
-        </p:nvSpPr>
-        <p:spPr>
-          <a:xfrm>
-            <a:off x="777240" y="4807358"/>
-            <a:ext cx="10607040" cy="548640"/>
-          </a:xfrm>
-          <a:prstGeom prst="rect">
-            <a:avLst/>
-          </a:prstGeom>
-          <a:noFill/>
-        </p:spPr>
-        <p:txBody>
-          <a:bodyPr wrap="square" lIns="45720" rIns="45720" tIns="18288" bIns="18288" anchor="t">
-            <a:spAutoFit/>
-          </a:bodyPr>
-          <a:lstStyle/>
-          <a:p>
-            <a:pPr algn="ctr"/>
-            <a:r>
               <a:rPr sz="3200" b="1" i="0">
                 <a:solidFill>
                   <a:srgbClr val="9E1B32"/>
                 </a:solidFill>
                 <a:latin typeface="Century Schoolbook"/>
               </a:rPr>
-              <a:t>Answer:   56 centimetres</a:t>
+              <a:t>Answer:   56 centimeters</a:t>
             </a:r>
           </a:p>
         </p:txBody>

--- a/a7/packages/A7 Unit 4 - Solving Problems with Rational Numbers/Slides/A7 4.06  Slides.pptx
+++ b/a7/packages/A7 Unit 4 - Solving Problems with Rational Numbers/Slides/A7 4.06  Slides.pptx
@@ -3442,7 +3442,7 @@
                 </a:solidFill>
                 <a:latin typeface="Century Schoolbook"/>
               </a:rPr>
-              <a:t>Today every grouping symbol at once — and the order comes from the structure, not from a mnemonic.</a:t>
+              <a:t>Today: all the grouping symbols — structure sets the order.</a:t>
             </a:r>
           </a:p>
         </p:txBody>
